--- a/classes/parte-14-grc-riesgo-y-cumplimiento/288-seguros-ciberneticos/clase-288-presentacion.pptx
+++ b/classes/parte-14-grc-riesgo-y-cumplimiento/288-seguros-ciberneticos/clase-288-presentacion.pptx
@@ -17,6 +17,10 @@
     <p:sldId id="265" r:id="rId16"/>
     <p:sldId id="266" r:id="rId17"/>
     <p:sldId id="267" r:id="rId18"/>
+    <p:sldId id="268" r:id="rId19"/>
+    <p:sldId id="269" r:id="rId20"/>
+    <p:sldId id="270" r:id="rId21"/>
+    <p:sldId id="271" r:id="rId22"/>
   </p:sldIdLst>
   <p:sldSz cx="9144000" cy="6858000" type="screen4x3"/>
   <p:notesSz cx="6858000" cy="9144000"/>
@@ -3198,7 +3202,7 @@
                   <a:srgbClr val="0B3D2E"/>
                 </a:solidFill>
               </a:rPr>
-              <a:t>⚠️ Errores comunes</a:t>
+              <a:t>🧪 Laboratorio guiado (ejercicio aplicado)</a:t>
             </a:r>
           </a:p>
         </p:txBody>
@@ -3236,67 +3240,97 @@
                   <a:srgbClr val="22282E"/>
                 </a:solidFill>
               </a:rPr>
-              <a:t>•  "Con el seguro no necesito invertir en controles" — Riesgo moral; las aseguradoras exigen controles y deniegan sin ellos</a:t>
-            </a:r>
-          </a:p>
-          <a:p>
-            <a:pPr>
-              <a:spcAft>
-                <a:spcPts val="600"/>
-              </a:spcAft>
-            </a:pPr>
-            <a:r>
-              <a:rPr sz="1500">
-                <a:solidFill>
-                  <a:srgbClr val="22282E"/>
-                </a:solidFill>
-              </a:rPr>
-              <a:t>•  Declarar controles que no se tienen — Anula la cobertura; declara solo lo que operas y puedes evidenciar</a:t>
-            </a:r>
-          </a:p>
-          <a:p>
-            <a:pPr>
-              <a:spcAft>
-                <a:spcPts val="600"/>
-              </a:spcAft>
-            </a:pPr>
-            <a:r>
-              <a:rPr sz="1500">
-                <a:solidFill>
-                  <a:srgbClr val="22282E"/>
-                </a:solidFill>
-              </a:rPr>
-              <a:t>•  Ignorar los sublímites — Un sublímite bajo de ransomware deja la mayor pérdida descubierta</a:t>
-            </a:r>
-          </a:p>
-          <a:p>
-            <a:pPr>
-              <a:spcAft>
-                <a:spcPts val="600"/>
-              </a:spcAft>
-            </a:pPr>
-            <a:r>
-              <a:rPr sz="1500">
-                <a:solidFill>
-                  <a:srgbClr val="22282E"/>
-                </a:solidFill>
-              </a:rPr>
-              <a:t>•  No leer las exclusiones — Sorpresa en el siniestro; revisa guerra, negligencia, parches</a:t>
-            </a:r>
-          </a:p>
-          <a:p>
-            <a:pPr>
-              <a:spcAft>
-                <a:spcPts val="600"/>
-              </a:spcAft>
-            </a:pPr>
-            <a:r>
-              <a:rPr sz="1500">
-                <a:solidFill>
-                  <a:srgbClr val="22282E"/>
-                </a:solidFill>
-              </a:rPr>
-              <a:t>•  Suma asegurada al azar — Deriva del ALE y del peor caso plausible (P90)</a:t>
+              <a:t>•  Vas a evaluar la contratación de un ciberseguro para "Ferretería del Sur S.A.".</a:t>
+            </a:r>
+          </a:p>
+          <a:p>
+            <a:pPr>
+              <a:spcAft>
+                <a:spcPts val="600"/>
+              </a:spcAft>
+            </a:pPr>
+            <a:r>
+              <a:rPr sz="1500">
+                <a:solidFill>
+                  <a:srgbClr val="22282E"/>
+                </a:solidFill>
+              </a:rPr>
+              <a:t>•  Punto de partida: recupera el ALE de tus escenarios de la clase 277 (ransomware 15.000 €, brecha de datos, caída). Estima además el peor caso plausible (P90) de una brecha grave con multa GDPR y…</a:t>
+            </a:r>
+          </a:p>
+          <a:p>
+            <a:pPr>
+              <a:spcAft>
+                <a:spcPts val="600"/>
+              </a:spcAft>
+            </a:pPr>
+            <a:r>
+              <a:rPr sz="1500">
+                <a:solidFill>
+                  <a:srgbClr val="22282E"/>
+                </a:solidFill>
+              </a:rPr>
+              <a:t>•  Decisión de tratamiento: justifica qué parte del riesgo mitigas con controles, cuál aceptas y cuál transfieres al seguro.</a:t>
+            </a:r>
+          </a:p>
+          <a:p>
+            <a:pPr>
+              <a:spcAft>
+                <a:spcPts val="600"/>
+              </a:spcAft>
+            </a:pPr>
+            <a:r>
+              <a:rPr sz="1500">
+                <a:solidFill>
+                  <a:srgbClr val="22282E"/>
+                </a:solidFill>
+              </a:rPr>
+              <a:t>•  Coberturas necesarias: lista las coberturas que pedirías (forense, restauración, notificación a afectados, defensa legal, sanciones asegurables, extorsión/ransomware, lucro cesante).</a:t>
+            </a:r>
+          </a:p>
+          <a:p>
+            <a:pPr>
+              <a:spcAft>
+                <a:spcPts val="600"/>
+              </a:spcAft>
+            </a:pPr>
+            <a:r>
+              <a:rPr sz="1500">
+                <a:solidFill>
+                  <a:srgbClr val="22282E"/>
+                </a:solidFill>
+              </a:rPr>
+              <a:t>•  Cuestionario de suscripción: responde (para la empresa ficticia) las preguntas típicas: ¿MFA en accesos remotos y privilegiados? ¿EDR desplegado? ¿backups offline probados? ¿plan de respuesta a…</a:t>
+            </a:r>
+          </a:p>
+          <a:p>
+            <a:pPr>
+              <a:spcAft>
+                <a:spcPts val="600"/>
+              </a:spcAft>
+            </a:pPr>
+            <a:r>
+              <a:rPr sz="1500">
+                <a:solidFill>
+                  <a:srgbClr val="22282E"/>
+                </a:solidFill>
+              </a:rPr>
+              <a:t>•  Brechas que suben la prima: identifica 3 carencias del cuestionario y qué control implementarías para bajar la prima o poder asegurarte.</a:t>
+            </a:r>
+          </a:p>
+          <a:p>
+            <a:pPr>
+              <a:spcAft>
+                <a:spcPts val="600"/>
+              </a:spcAft>
+            </a:pPr>
+            <a:r>
+              <a:rPr sz="1500">
+                <a:solidFill>
+                  <a:srgbClr val="22282E"/>
+                </a:solidFill>
+              </a:rPr>
+              <a:t>•  Análisis de exclusiones: revisa una lista de exclusiones típicas (guerra, controles declarados inexistentes, incumplimiento de parches conocidos) y explica el riesgo de declarar controles que no…</a:t>
             </a:r>
           </a:p>
         </p:txBody>
@@ -3347,7 +3381,7 @@
                   <a:srgbClr val="0B3D2E"/>
                 </a:solidFill>
               </a:rPr>
-              <a:t>❓ Preguntas frecuentes</a:t>
+              <a:t>✍️ Ejercicios</a:t>
             </a:r>
           </a:p>
         </p:txBody>
@@ -3385,97 +3419,82 @@
                   <a:srgbClr val="22282E"/>
                 </a:solidFill>
               </a:rPr>
-              <a:t>•  ❓ ¿El ciberseguro sustituye a tener buena seguridad?</a:t>
-            </a:r>
-          </a:p>
-          <a:p>
-            <a:pPr>
-              <a:spcAft>
-                <a:spcPts val="600"/>
-              </a:spcAft>
-            </a:pPr>
-            <a:r>
-              <a:rPr sz="1500">
-                <a:solidFill>
-                  <a:srgbClr val="22282E"/>
-                </a:solidFill>
-              </a:rPr>
-              <a:t>•  No. Es la cuarta opción de tratamiento (transferir), para el riesgo residual que no puedes mitigar económicamente. Sin controles, ni te aseguran ni te pagan.</a:t>
-            </a:r>
-          </a:p>
-          <a:p>
-            <a:pPr>
-              <a:spcAft>
-                <a:spcPts val="600"/>
-              </a:spcAft>
-            </a:pPr>
-            <a:r>
-              <a:rPr sz="1500">
-                <a:solidFill>
-                  <a:srgbClr val="22282E"/>
-                </a:solidFill>
-              </a:rPr>
-              <a:t>•  ❓ ¿Cubre las multas de GDPR?</a:t>
-            </a:r>
-          </a:p>
-          <a:p>
-            <a:pPr>
-              <a:spcAft>
-                <a:spcPts val="600"/>
-              </a:spcAft>
-            </a:pPr>
-            <a:r>
-              <a:rPr sz="1500">
-                <a:solidFill>
-                  <a:srgbClr val="22282E"/>
-                </a:solidFill>
-              </a:rPr>
-              <a:t>•  Depende de la póliza y la jurisdicción; algunas sanciones no son asegurables por ley. Revisa la cobertura de "sanciones regulatorias asegurables".</a:t>
-            </a:r>
-          </a:p>
-          <a:p>
-            <a:pPr>
-              <a:spcAft>
-                <a:spcPts val="600"/>
-              </a:spcAft>
-            </a:pPr>
-            <a:r>
-              <a:rPr sz="1500">
-                <a:solidFill>
-                  <a:srgbClr val="22282E"/>
-                </a:solidFill>
-              </a:rPr>
-              <a:t>•  ❓ ¿Por qué me piden MFA y EDR para asegurarme?</a:t>
-            </a:r>
-          </a:p>
-          <a:p>
-            <a:pPr>
-              <a:spcAft>
-                <a:spcPts val="600"/>
-              </a:spcAft>
-            </a:pPr>
-            <a:r>
-              <a:rPr sz="1500">
-                <a:solidFill>
-                  <a:srgbClr val="22282E"/>
-                </a:solidFill>
-              </a:rPr>
-              <a:t>•  Porque reducen drásticamente la frecuencia y el impacto de los siniestros. Se han vuelto requisitos mínimos de suscripción.</a:t>
-            </a:r>
-          </a:p>
-          <a:p>
-            <a:pPr>
-              <a:spcAft>
-                <a:spcPts val="600"/>
-              </a:spcAft>
-            </a:pPr>
-            <a:r>
-              <a:rPr sz="1500">
-                <a:solidFill>
-                  <a:srgbClr val="22282E"/>
-                </a:solidFill>
-              </a:rPr>
-              <a:t>•  ❓ ¿Qué pasa si mentí en el cuestionario?</a:t>
+              <a:t>•  Clasifica en primera o tercera parte: honorarios de abogados por demanda de clientes; coste del forense; multa de la autoridad de protección de datos.</a:t>
+            </a:r>
+          </a:p>
+          <a:p>
+            <a:pPr>
+              <a:spcAft>
+                <a:spcPts val="600"/>
+              </a:spcAft>
+            </a:pPr>
+            <a:r>
+              <a:rPr sz="1500">
+                <a:solidFill>
+                  <a:srgbClr val="22282E"/>
+                </a:solidFill>
+              </a:rPr>
+              <a:t>•  Explica por qué el seguro transfiere el coste pero no la responsabilidad legal.</a:t>
+            </a:r>
+          </a:p>
+          <a:p>
+            <a:pPr>
+              <a:spcAft>
+                <a:spcPts val="600"/>
+              </a:spcAft>
+            </a:pPr>
+            <a:r>
+              <a:rPr sz="1500">
+                <a:solidFill>
+                  <a:srgbClr val="22282E"/>
+                </a:solidFill>
+              </a:rPr>
+              <a:t>•  Un asegurado declaró tener MFA pero no lo tenía; sufre ransomware. ¿Qué puede pasar con el siniestro?</a:t>
+            </a:r>
+          </a:p>
+          <a:p>
+            <a:pPr>
+              <a:spcAft>
+                <a:spcPts val="600"/>
+              </a:spcAft>
+            </a:pPr>
+            <a:r>
+              <a:rPr sz="1500">
+                <a:solidFill>
+                  <a:srgbClr val="22282E"/>
+                </a:solidFill>
+              </a:rPr>
+              <a:t>•  Dado un ALE y un P90, argumenta qué límite de cobertura pedirías.</a:t>
+            </a:r>
+          </a:p>
+          <a:p>
+            <a:pPr>
+              <a:spcAft>
+                <a:spcPts val="600"/>
+              </a:spcAft>
+            </a:pPr>
+            <a:r>
+              <a:rPr sz="1500">
+                <a:solidFill>
+                  <a:srgbClr val="22282E"/>
+                </a:solidFill>
+              </a:rPr>
+              <a:t>•  Enumera 4 requisitos de suscripción habituales y por qué las aseguradoras los exigen.</a:t>
+            </a:r>
+          </a:p>
+          <a:p>
+            <a:pPr>
+              <a:spcAft>
+                <a:spcPts val="600"/>
+              </a:spcAft>
+            </a:pPr>
+            <a:r>
+              <a:rPr sz="1500">
+                <a:solidFill>
+                  <a:srgbClr val="22282E"/>
+                </a:solidFill>
+              </a:rPr>
+              <a:t>•  Explica el "riesgo moral" de confiar solo en el seguro y descuidar los controles.</a:t>
             </a:r>
           </a:p>
         </p:txBody>
@@ -3526,7 +3545,7 @@
                   <a:srgbClr val="0B3D2E"/>
                 </a:solidFill>
               </a:rPr>
-              <a:t>🔗 Referencias</a:t>
+              <a:t>📝 Reto verificable</a:t>
             </a:r>
           </a:p>
         </p:txBody>
@@ -3564,6 +3583,438 @@
                   <a:srgbClr val="22282E"/>
                 </a:solidFill>
               </a:rPr>
+              <a:t>•  Entrega un dossier de evaluación de ciberseguro con: decisión de tratamiento (mitigar/aceptar/transferir) justificada por el ALE, lista de coberturas requeridas, cuestionario de suscripción…</a:t>
+            </a:r>
+          </a:p>
+          <a:p>
+            <a:pPr>
+              <a:spcAft>
+                <a:spcPts val="600"/>
+              </a:spcAft>
+            </a:pPr>
+            <a:r>
+              <a:rPr sz="1500">
+                <a:solidFill>
+                  <a:srgbClr val="22282E"/>
+                </a:solidFill>
+              </a:rPr>
+              <a:t>•  Criterio de aceptación: la suma asegurada se justifica con el análisis de riesgo (ALE/P90), se identifican al menos 3 controles que mejorarían la asegurabilidad, y el dossier deja claro que el seguro…</a:t>
+            </a:r>
+          </a:p>
+        </p:txBody>
+      </p:sp>
+    </p:spTree>
+  </p:cSld>
+  <p:clrMapOvr>
+    <a:masterClrMapping/>
+  </p:clrMapOvr>
+</p:sld>
+</file>
+
+<file path=ppt/slides/slide13.xml><?xml version="1.0" encoding="utf-8"?>
+<p:sld xmlns:a="http://schemas.openxmlformats.org/drawingml/2006/main" xmlns:p="http://schemas.openxmlformats.org/presentationml/2006/main" xmlns:r="http://schemas.openxmlformats.org/officeDocument/2006/relationships">
+  <p:cSld>
+    <p:spTree>
+      <p:nvGrpSpPr>
+        <p:cNvPr id="1" name=""/>
+        <p:cNvGrpSpPr/>
+        <p:nvPr/>
+      </p:nvGrpSpPr>
+      <p:grpSpPr/>
+      <p:sp>
+        <p:nvSpPr>
+          <p:cNvPr id="2" name="TextBox 1"/>
+          <p:cNvSpPr txBox="1"/>
+          <p:nvPr/>
+        </p:nvSpPr>
+        <p:spPr>
+          <a:xfrm>
+            <a:off x="457200" y="320040"/>
+            <a:ext cx="8229600" cy="822960"/>
+          </a:xfrm>
+          <a:prstGeom prst="rect">
+            <a:avLst/>
+          </a:prstGeom>
+          <a:noFill/>
+        </p:spPr>
+        <p:txBody>
+          <a:bodyPr wrap="square">
+            <a:spAutoFit/>
+          </a:bodyPr>
+          <a:lstStyle/>
+          <a:p>
+            <a:r>
+              <a:rPr sz="2600" b="1">
+                <a:solidFill>
+                  <a:srgbClr val="0B3D2E"/>
+                </a:solidFill>
+              </a:rPr>
+              <a:t>⚠️ Errores comunes</a:t>
+            </a:r>
+          </a:p>
+        </p:txBody>
+      </p:sp>
+      <p:sp>
+        <p:nvSpPr>
+          <p:cNvPr id="3" name="TextBox 2"/>
+          <p:cNvSpPr txBox="1"/>
+          <p:nvPr/>
+        </p:nvSpPr>
+        <p:spPr>
+          <a:xfrm>
+            <a:off x="457200" y="1280160"/>
+            <a:ext cx="8229600" cy="4937760"/>
+          </a:xfrm>
+          <a:prstGeom prst="rect">
+            <a:avLst/>
+          </a:prstGeom>
+          <a:noFill/>
+        </p:spPr>
+        <p:txBody>
+          <a:bodyPr wrap="square">
+            <a:spAutoFit/>
+          </a:bodyPr>
+          <a:lstStyle/>
+          <a:p>
+            <a:pPr>
+              <a:spcAft>
+                <a:spcPts val="600"/>
+              </a:spcAft>
+            </a:pPr>
+            <a:r>
+              <a:rPr sz="1500">
+                <a:solidFill>
+                  <a:srgbClr val="22282E"/>
+                </a:solidFill>
+              </a:rPr>
+              <a:t>•  "Con el seguro no necesito invertir en controles" — Riesgo moral; las aseguradoras exigen controles y deniegan sin ellos</a:t>
+            </a:r>
+          </a:p>
+          <a:p>
+            <a:pPr>
+              <a:spcAft>
+                <a:spcPts val="600"/>
+              </a:spcAft>
+            </a:pPr>
+            <a:r>
+              <a:rPr sz="1500">
+                <a:solidFill>
+                  <a:srgbClr val="22282E"/>
+                </a:solidFill>
+              </a:rPr>
+              <a:t>•  Declarar controles que no se tienen — Anula la cobertura; declara solo lo que operas y puedes evidenciar</a:t>
+            </a:r>
+          </a:p>
+          <a:p>
+            <a:pPr>
+              <a:spcAft>
+                <a:spcPts val="600"/>
+              </a:spcAft>
+            </a:pPr>
+            <a:r>
+              <a:rPr sz="1500">
+                <a:solidFill>
+                  <a:srgbClr val="22282E"/>
+                </a:solidFill>
+              </a:rPr>
+              <a:t>•  Ignorar los sublímites — Un sublímite bajo de ransomware deja la mayor pérdida descubierta</a:t>
+            </a:r>
+          </a:p>
+          <a:p>
+            <a:pPr>
+              <a:spcAft>
+                <a:spcPts val="600"/>
+              </a:spcAft>
+            </a:pPr>
+            <a:r>
+              <a:rPr sz="1500">
+                <a:solidFill>
+                  <a:srgbClr val="22282E"/>
+                </a:solidFill>
+              </a:rPr>
+              <a:t>•  No leer las exclusiones — Sorpresa en el siniestro; revisa guerra, negligencia, parches</a:t>
+            </a:r>
+          </a:p>
+          <a:p>
+            <a:pPr>
+              <a:spcAft>
+                <a:spcPts val="600"/>
+              </a:spcAft>
+            </a:pPr>
+            <a:r>
+              <a:rPr sz="1500">
+                <a:solidFill>
+                  <a:srgbClr val="22282E"/>
+                </a:solidFill>
+              </a:rPr>
+              <a:t>•  Suma asegurada al azar — Deriva del ALE y del peor caso plausible (P90)</a:t>
+            </a:r>
+          </a:p>
+        </p:txBody>
+      </p:sp>
+    </p:spTree>
+  </p:cSld>
+  <p:clrMapOvr>
+    <a:masterClrMapping/>
+  </p:clrMapOvr>
+</p:sld>
+</file>
+
+<file path=ppt/slides/slide14.xml><?xml version="1.0" encoding="utf-8"?>
+<p:sld xmlns:a="http://schemas.openxmlformats.org/drawingml/2006/main" xmlns:p="http://schemas.openxmlformats.org/presentationml/2006/main" xmlns:r="http://schemas.openxmlformats.org/officeDocument/2006/relationships">
+  <p:cSld>
+    <p:spTree>
+      <p:nvGrpSpPr>
+        <p:cNvPr id="1" name=""/>
+        <p:cNvGrpSpPr/>
+        <p:nvPr/>
+      </p:nvGrpSpPr>
+      <p:grpSpPr/>
+      <p:sp>
+        <p:nvSpPr>
+          <p:cNvPr id="2" name="TextBox 1"/>
+          <p:cNvSpPr txBox="1"/>
+          <p:nvPr/>
+        </p:nvSpPr>
+        <p:spPr>
+          <a:xfrm>
+            <a:off x="457200" y="320040"/>
+            <a:ext cx="8229600" cy="822960"/>
+          </a:xfrm>
+          <a:prstGeom prst="rect">
+            <a:avLst/>
+          </a:prstGeom>
+          <a:noFill/>
+        </p:spPr>
+        <p:txBody>
+          <a:bodyPr wrap="square">
+            <a:spAutoFit/>
+          </a:bodyPr>
+          <a:lstStyle/>
+          <a:p>
+            <a:r>
+              <a:rPr sz="2600" b="1">
+                <a:solidFill>
+                  <a:srgbClr val="0B3D2E"/>
+                </a:solidFill>
+              </a:rPr>
+              <a:t>❓ Preguntas frecuentes</a:t>
+            </a:r>
+          </a:p>
+        </p:txBody>
+      </p:sp>
+      <p:sp>
+        <p:nvSpPr>
+          <p:cNvPr id="3" name="TextBox 2"/>
+          <p:cNvSpPr txBox="1"/>
+          <p:nvPr/>
+        </p:nvSpPr>
+        <p:spPr>
+          <a:xfrm>
+            <a:off x="457200" y="1280160"/>
+            <a:ext cx="8229600" cy="4937760"/>
+          </a:xfrm>
+          <a:prstGeom prst="rect">
+            <a:avLst/>
+          </a:prstGeom>
+          <a:noFill/>
+        </p:spPr>
+        <p:txBody>
+          <a:bodyPr wrap="square">
+            <a:spAutoFit/>
+          </a:bodyPr>
+          <a:lstStyle/>
+          <a:p>
+            <a:pPr>
+              <a:spcAft>
+                <a:spcPts val="600"/>
+              </a:spcAft>
+            </a:pPr>
+            <a:r>
+              <a:rPr sz="1500">
+                <a:solidFill>
+                  <a:srgbClr val="22282E"/>
+                </a:solidFill>
+              </a:rPr>
+              <a:t>•  ❓ ¿El ciberseguro sustituye a tener buena seguridad?</a:t>
+            </a:r>
+          </a:p>
+          <a:p>
+            <a:pPr>
+              <a:spcAft>
+                <a:spcPts val="600"/>
+              </a:spcAft>
+            </a:pPr>
+            <a:r>
+              <a:rPr sz="1500">
+                <a:solidFill>
+                  <a:srgbClr val="22282E"/>
+                </a:solidFill>
+              </a:rPr>
+              <a:t>•  No. Es la cuarta opción de tratamiento (transferir), para el riesgo residual que no puedes mitigar económicamente. Sin controles, ni te aseguran ni te pagan.</a:t>
+            </a:r>
+          </a:p>
+          <a:p>
+            <a:pPr>
+              <a:spcAft>
+                <a:spcPts val="600"/>
+              </a:spcAft>
+            </a:pPr>
+            <a:r>
+              <a:rPr sz="1500">
+                <a:solidFill>
+                  <a:srgbClr val="22282E"/>
+                </a:solidFill>
+              </a:rPr>
+              <a:t>•  ❓ ¿Cubre las multas de GDPR?</a:t>
+            </a:r>
+          </a:p>
+          <a:p>
+            <a:pPr>
+              <a:spcAft>
+                <a:spcPts val="600"/>
+              </a:spcAft>
+            </a:pPr>
+            <a:r>
+              <a:rPr sz="1500">
+                <a:solidFill>
+                  <a:srgbClr val="22282E"/>
+                </a:solidFill>
+              </a:rPr>
+              <a:t>•  Depende de la póliza y la jurisdicción; algunas sanciones no son asegurables por ley. Revisa la cobertura de "sanciones regulatorias asegurables".</a:t>
+            </a:r>
+          </a:p>
+          <a:p>
+            <a:pPr>
+              <a:spcAft>
+                <a:spcPts val="600"/>
+              </a:spcAft>
+            </a:pPr>
+            <a:r>
+              <a:rPr sz="1500">
+                <a:solidFill>
+                  <a:srgbClr val="22282E"/>
+                </a:solidFill>
+              </a:rPr>
+              <a:t>•  ❓ ¿Por qué me piden MFA y EDR para asegurarme?</a:t>
+            </a:r>
+          </a:p>
+          <a:p>
+            <a:pPr>
+              <a:spcAft>
+                <a:spcPts val="600"/>
+              </a:spcAft>
+            </a:pPr>
+            <a:r>
+              <a:rPr sz="1500">
+                <a:solidFill>
+                  <a:srgbClr val="22282E"/>
+                </a:solidFill>
+              </a:rPr>
+              <a:t>•  Porque reducen drásticamente la frecuencia y el impacto de los siniestros. Se han vuelto requisitos mínimos de suscripción.</a:t>
+            </a:r>
+          </a:p>
+          <a:p>
+            <a:pPr>
+              <a:spcAft>
+                <a:spcPts val="600"/>
+              </a:spcAft>
+            </a:pPr>
+            <a:r>
+              <a:rPr sz="1500">
+                <a:solidFill>
+                  <a:srgbClr val="22282E"/>
+                </a:solidFill>
+              </a:rPr>
+              <a:t>•  ❓ ¿Qué pasa si mentí en el cuestionario?</a:t>
+            </a:r>
+          </a:p>
+        </p:txBody>
+      </p:sp>
+    </p:spTree>
+  </p:cSld>
+  <p:clrMapOvr>
+    <a:masterClrMapping/>
+  </p:clrMapOvr>
+</p:sld>
+</file>
+
+<file path=ppt/slides/slide15.xml><?xml version="1.0" encoding="utf-8"?>
+<p:sld xmlns:a="http://schemas.openxmlformats.org/drawingml/2006/main" xmlns:p="http://schemas.openxmlformats.org/presentationml/2006/main" xmlns:r="http://schemas.openxmlformats.org/officeDocument/2006/relationships">
+  <p:cSld>
+    <p:spTree>
+      <p:nvGrpSpPr>
+        <p:cNvPr id="1" name=""/>
+        <p:cNvGrpSpPr/>
+        <p:nvPr/>
+      </p:nvGrpSpPr>
+      <p:grpSpPr/>
+      <p:sp>
+        <p:nvSpPr>
+          <p:cNvPr id="2" name="TextBox 1"/>
+          <p:cNvSpPr txBox="1"/>
+          <p:nvPr/>
+        </p:nvSpPr>
+        <p:spPr>
+          <a:xfrm>
+            <a:off x="457200" y="320040"/>
+            <a:ext cx="8229600" cy="822960"/>
+          </a:xfrm>
+          <a:prstGeom prst="rect">
+            <a:avLst/>
+          </a:prstGeom>
+          <a:noFill/>
+        </p:spPr>
+        <p:txBody>
+          <a:bodyPr wrap="square">
+            <a:spAutoFit/>
+          </a:bodyPr>
+          <a:lstStyle/>
+          <a:p>
+            <a:r>
+              <a:rPr sz="2600" b="1">
+                <a:solidFill>
+                  <a:srgbClr val="0B3D2E"/>
+                </a:solidFill>
+              </a:rPr>
+              <a:t>🔗 Referencias</a:t>
+            </a:r>
+          </a:p>
+        </p:txBody>
+      </p:sp>
+      <p:sp>
+        <p:nvSpPr>
+          <p:cNvPr id="3" name="TextBox 2"/>
+          <p:cNvSpPr txBox="1"/>
+          <p:nvPr/>
+        </p:nvSpPr>
+        <p:spPr>
+          <a:xfrm>
+            <a:off x="457200" y="1280160"/>
+            <a:ext cx="8229600" cy="4937760"/>
+          </a:xfrm>
+          <a:prstGeom prst="rect">
+            <a:avLst/>
+          </a:prstGeom>
+          <a:noFill/>
+        </p:spPr>
+        <p:txBody>
+          <a:bodyPr wrap="square">
+            <a:spAutoFit/>
+          </a:bodyPr>
+          <a:lstStyle/>
+          <a:p>
+            <a:pPr>
+              <a:spcAft>
+                <a:spcPts val="600"/>
+              </a:spcAft>
+            </a:pPr>
+            <a:r>
+              <a:rPr sz="1500">
+                <a:solidFill>
+                  <a:srgbClr val="22282E"/>
+                </a:solidFill>
+              </a:rPr>
               <a:t>•  Hubbard &amp; Seiersen — How to Measure Anything in Cybersecurity Risk (transferencia y cuantificación).</a:t>
             </a:r>
           </a:p>
@@ -3629,6 +4080,81 @@
           </a:p>
         </p:txBody>
       </p:sp>
+    </p:spTree>
+  </p:cSld>
+  <p:clrMapOvr>
+    <a:masterClrMapping/>
+  </p:clrMapOvr>
+</p:sld>
+</file>
+
+<file path=ppt/slides/slide16.xml><?xml version="1.0" encoding="utf-8"?>
+<p:sld xmlns:a="http://schemas.openxmlformats.org/drawingml/2006/main" xmlns:p="http://schemas.openxmlformats.org/presentationml/2006/main" xmlns:r="http://schemas.openxmlformats.org/officeDocument/2006/relationships">
+  <p:cSld>
+    <p:spTree>
+      <p:nvGrpSpPr>
+        <p:cNvPr id="1" name=""/>
+        <p:cNvGrpSpPr/>
+        <p:nvPr/>
+      </p:nvGrpSpPr>
+      <p:grpSpPr/>
+      <p:sp>
+        <p:nvSpPr>
+          <p:cNvPr id="2" name="TextBox 1"/>
+          <p:cNvSpPr txBox="1"/>
+          <p:nvPr/>
+        </p:nvSpPr>
+        <p:spPr>
+          <a:xfrm>
+            <a:off x="457200" y="274320"/>
+            <a:ext cx="8229600" cy="640080"/>
+          </a:xfrm>
+          <a:prstGeom prst="rect">
+            <a:avLst/>
+          </a:prstGeom>
+          <a:noFill/>
+        </p:spPr>
+        <p:txBody>
+          <a:bodyPr wrap="square">
+            <a:spAutoFit/>
+          </a:bodyPr>
+          <a:lstStyle/>
+          <a:p>
+            <a:r>
+              <a:rPr sz="2200" b="1">
+                <a:solidFill>
+                  <a:srgbClr val="0B3D2E"/>
+                </a:solidFill>
+              </a:rPr>
+              <a:t>Diagrama de la clase</a:t>
+            </a:r>
+          </a:p>
+        </p:txBody>
+      </p:sp>
+      <p:pic>
+        <p:nvPicPr>
+          <p:cNvPr id="3" name="Picture 2" descr="7b0b90d332a29134.png"/>
+          <p:cNvPicPr>
+            <a:picLocks noChangeAspect="1"/>
+          </p:cNvPicPr>
+          <p:nvPr/>
+        </p:nvPicPr>
+        <p:blipFill>
+          <a:blip r:embed="rId2"/>
+          <a:stretch>
+            <a:fillRect/>
+          </a:stretch>
+        </p:blipFill>
+        <p:spPr>
+          <a:xfrm>
+            <a:off x="457200" y="3511296"/>
+            <a:ext cx="8229600" cy="475488"/>
+          </a:xfrm>
+          <a:prstGeom prst="rect">
+            <a:avLst/>
+          </a:prstGeom>
+        </p:spPr>
+      </p:pic>
     </p:spTree>
   </p:cSld>
   <p:clrMapOvr>
@@ -3713,7 +4239,7 @@
                   <a:srgbClr val="22282E"/>
                 </a:solidFill>
               </a:rPr>
-              <a:t>•  Entender el ciberseguro como mecanismo de transferencia de riesgo y su papel dentro de la estrategia GRC. Al terminar sabrás qué cubre y qué excluye una póliza, cómo se calcula la prima, qué requisitos de seguridad exigen hoy las aseguradoras (MFA, EDR, backups), cómo cuantificar la cobertura adecuada y por qué el seguro complementa —pero nunca sustituye— a los controles.</a:t>
+              <a:t>•  Entender el ciberseguro como mecanismo de transferencia de riesgo y su papel dentro de la estrategia GRC. Al terminar sabrás qué cubre y qué excluye una póliza, cómo se calcula la prima, qué…</a:t>
             </a:r>
           </a:p>
         </p:txBody>
@@ -4107,7 +4633,7 @@
                   <a:srgbClr val="0B3D2E"/>
                 </a:solidFill>
               </a:rPr>
-              <a:t>📖 Definiciones y características</a:t>
+              <a:t>🧠 Explicación en profundidad</a:t>
             </a:r>
           </a:p>
         </p:txBody>
@@ -4145,97 +4671,22 @@
                   <a:srgbClr val="22282E"/>
                 </a:solidFill>
               </a:rPr>
-              <a:t>•  Transferencia de riesgo: trasladar el impacto financiero a un tercero (aseguradora). Clave: transfiere el coste, no la responsabilidad.</a:t>
-            </a:r>
-          </a:p>
-          <a:p>
-            <a:pPr>
-              <a:spcAft>
-                <a:spcPts val="600"/>
-              </a:spcAft>
-            </a:pPr>
-            <a:r>
-              <a:rPr sz="1500">
-                <a:solidFill>
-                  <a:srgbClr val="22282E"/>
-                </a:solidFill>
-              </a:rPr>
-              <a:t>•  Cobertura de primera parte: gastos propios (recuperación, forense, notificación, extorsión, lucro cesante). Clave: te paga a ti.</a:t>
-            </a:r>
-          </a:p>
-          <a:p>
-            <a:pPr>
-              <a:spcAft>
-                <a:spcPts val="600"/>
-              </a:spcAft>
-            </a:pPr>
-            <a:r>
-              <a:rPr sz="1500">
-                <a:solidFill>
-                  <a:srgbClr val="22282E"/>
-                </a:solidFill>
-              </a:rPr>
-              <a:t>•  Cobertura de tercera parte: reclamaciones de terceros (clientes, reguladores) por la brecha. Clave: te defiende frente a otros.</a:t>
-            </a:r>
-          </a:p>
-          <a:p>
-            <a:pPr>
-              <a:spcAft>
-                <a:spcPts val="600"/>
-              </a:spcAft>
-            </a:pPr>
-            <a:r>
-              <a:rPr sz="1500">
-                <a:solidFill>
-                  <a:srgbClr val="22282E"/>
-                </a:solidFill>
-              </a:rPr>
-              <a:t>•  Exclusión: supuesto no cubierto (actos de guerra, negligencia grave, controles falsos declarados). Clave: leer siempre la letra pequeña.</a:t>
-            </a:r>
-          </a:p>
-          <a:p>
-            <a:pPr>
-              <a:spcAft>
-                <a:spcPts val="600"/>
-              </a:spcAft>
-            </a:pPr>
-            <a:r>
-              <a:rPr sz="1500">
-                <a:solidFill>
-                  <a:srgbClr val="22282E"/>
-                </a:solidFill>
-              </a:rPr>
-              <a:t>•  Límite y sublímite: máximo total y máximo por tipo de cobertura. Clave: un sublímite bajo de ransomware puede dejarte corto.</a:t>
-            </a:r>
-          </a:p>
-          <a:p>
-            <a:pPr>
-              <a:spcAft>
-                <a:spcPts val="600"/>
-              </a:spcAft>
-            </a:pPr>
-            <a:r>
-              <a:rPr sz="1500">
-                <a:solidFill>
-                  <a:srgbClr val="22282E"/>
-                </a:solidFill>
-              </a:rPr>
-              <a:t>•  Franquicia (deducible): importe que asumes antes de que pague el seguro. Clave: a mayor franquicia, menor prima.</a:t>
-            </a:r>
-          </a:p>
-          <a:p>
-            <a:pPr>
-              <a:spcAft>
-                <a:spcPts val="600"/>
-              </a:spcAft>
-            </a:pPr>
-            <a:r>
-              <a:rPr sz="1500">
-                <a:solidFill>
-                  <a:srgbClr val="22282E"/>
-                </a:solidFill>
-              </a:rPr>
-              <a:t>•  Underwriting: proceso de evaluación de tu riesgo para fijar prima y condiciones. Clave: exige evidencia de controles.</a:t>
+              <a:t>•  El seguro transfiere consecuencias financieras definidas; no transfiere responsabilidad operativa ni todo riesgo. Cobertura depende de definiciones, límites, retención, exclusiones, sublímites…</a:t>
+            </a:r>
+          </a:p>
+          <a:p>
+            <a:pPr>
+              <a:spcAft>
+                <a:spcPts val="600"/>
+              </a:spcAft>
+            </a:pPr>
+            <a:r>
+              <a:rPr sz="1500">
+                <a:solidFill>
+                  <a:srgbClr val="22282E"/>
+                </a:solidFill>
+              </a:rPr>
+              <a:t>•  Una organización contrata ransomware, pero no prueba restauración y omite el plazo de notificación. Seguro y resiliencia resuelven problemas distintos.</a:t>
             </a:r>
           </a:p>
         </p:txBody>
@@ -4286,7 +4737,7 @@
                   <a:srgbClr val="0B3D2E"/>
                 </a:solidFill>
               </a:rPr>
-              <a:t>🧰 Herramientas y preparación</a:t>
+              <a:t>📔 Glosario operativo</a:t>
             </a:r>
           </a:p>
         </p:txBody>
@@ -4324,52 +4775,52 @@
                   <a:srgbClr val="22282E"/>
                 </a:solidFill>
               </a:rPr>
-              <a:t>•  El resultado de tu análisis de riesgo cuantitativo (ALE) de la clase 277.</a:t>
-            </a:r>
-          </a:p>
-          <a:p>
-            <a:pPr>
-              <a:spcAft>
-                <a:spcPts val="600"/>
-              </a:spcAft>
-            </a:pPr>
-            <a:r>
-              <a:rPr sz="1500">
-                <a:solidFill>
-                  <a:srgbClr val="22282E"/>
-                </a:solidFill>
-              </a:rPr>
-              <a:t>•  Un cuestionario de suscripción de ciberseguro de referencia (los publican corredores y aseguradoras).</a:t>
-            </a:r>
-          </a:p>
-          <a:p>
-            <a:pPr>
-              <a:spcAft>
-                <a:spcPts val="600"/>
-              </a:spcAft>
-            </a:pPr>
-            <a:r>
-              <a:rPr sz="1500">
-                <a:solidFill>
-                  <a:srgbClr val="22282E"/>
-                </a:solidFill>
-              </a:rPr>
-              <a:t>•  Referencia conceptual: informes de mercado de ciberseguro (Marsh, Munich Re) y las guías de ENISA/CISA sobre transferencia de riesgo.</a:t>
-            </a:r>
-          </a:p>
-          <a:p>
-            <a:pPr>
-              <a:spcAft>
-                <a:spcPts val="600"/>
-              </a:spcAft>
-            </a:pPr>
-            <a:r>
-              <a:rPr sz="1500">
-                <a:solidFill>
-                  <a:srgbClr val="22282E"/>
-                </a:solidFill>
-              </a:rPr>
-              <a:t>•  Hoja de cálculo para comparar coberturas y calcular la suma asegurada.</a:t>
+              <a:t>•  Término — Definición</a:t>
+            </a:r>
+          </a:p>
+          <a:p>
+            <a:pPr>
+              <a:spcAft>
+                <a:spcPts val="600"/>
+              </a:spcAft>
+            </a:pPr>
+            <a:r>
+              <a:rPr sz="1500">
+                <a:solidFill>
+                  <a:srgbClr val="22282E"/>
+                </a:solidFill>
+              </a:rPr>
+              <a:t>•  Retención/deducible — Parte inicial de pérdida asumida por asegurado.</a:t>
+            </a:r>
+          </a:p>
+          <a:p>
+            <a:pPr>
+              <a:spcAft>
+                <a:spcPts val="600"/>
+              </a:spcAft>
+            </a:pPr>
+            <a:r>
+              <a:rPr sz="1500">
+                <a:solidFill>
+                  <a:srgbClr val="22282E"/>
+                </a:solidFill>
+              </a:rPr>
+              <a:t>•  Sublímite — Límite específico dentro de la cobertura.</a:t>
+            </a:r>
+          </a:p>
+          <a:p>
+            <a:pPr>
+              <a:spcAft>
+                <a:spcPts val="600"/>
+              </a:spcAft>
+            </a:pPr>
+            <a:r>
+              <a:rPr sz="1500">
+                <a:solidFill>
+                  <a:srgbClr val="22282E"/>
+                </a:solidFill>
+              </a:rPr>
+              <a:t>•  Exclusión — Circunstancia que la póliza no cubre.</a:t>
             </a:r>
           </a:p>
         </p:txBody>
@@ -4420,7 +4871,7 @@
                   <a:srgbClr val="0B3D2E"/>
                 </a:solidFill>
               </a:rPr>
-              <a:t>🧪 Laboratorio guiado (ejercicio aplicado)</a:t>
+              <a:t>✅ Criterio de dominio</a:t>
             </a:r>
           </a:p>
         </p:txBody>
@@ -4458,97 +4909,7 @@
                   <a:srgbClr val="22282E"/>
                 </a:solidFill>
               </a:rPr>
-              <a:t>•  Vas a evaluar la contratación de un ciberseguro para "Ferretería del Sur S.A.".</a:t>
-            </a:r>
-          </a:p>
-          <a:p>
-            <a:pPr>
-              <a:spcAft>
-                <a:spcPts val="600"/>
-              </a:spcAft>
-            </a:pPr>
-            <a:r>
-              <a:rPr sz="1500">
-                <a:solidFill>
-                  <a:srgbClr val="22282E"/>
-                </a:solidFill>
-              </a:rPr>
-              <a:t>•  Punto de partida: recupera el ALE de tus escenarios de la clase 277 (ransomware 15.000 €, brecha de datos, caída). Estima además el peor caso plausible (P90) de una brecha grave con multa GDPR y notificación (p. ej. 400.000 €).</a:t>
-            </a:r>
-          </a:p>
-          <a:p>
-            <a:pPr>
-              <a:spcAft>
-                <a:spcPts val="600"/>
-              </a:spcAft>
-            </a:pPr>
-            <a:r>
-              <a:rPr sz="1500">
-                <a:solidFill>
-                  <a:srgbClr val="22282E"/>
-                </a:solidFill>
-              </a:rPr>
-              <a:t>•  Decisión de tratamiento: justifica qué parte del riesgo mitigas con controles, cuál aceptas y cuál transfieres al seguro.</a:t>
-            </a:r>
-          </a:p>
-          <a:p>
-            <a:pPr>
-              <a:spcAft>
-                <a:spcPts val="600"/>
-              </a:spcAft>
-            </a:pPr>
-            <a:r>
-              <a:rPr sz="1500">
-                <a:solidFill>
-                  <a:srgbClr val="22282E"/>
-                </a:solidFill>
-              </a:rPr>
-              <a:t>•  Coberturas necesarias: lista las coberturas que pedirías (forense, restauración, notificación a afectados, defensa legal, sanciones asegurables, extorsión/ransomware, lucro cesante).</a:t>
-            </a:r>
-          </a:p>
-          <a:p>
-            <a:pPr>
-              <a:spcAft>
-                <a:spcPts val="600"/>
-              </a:spcAft>
-            </a:pPr>
-            <a:r>
-              <a:rPr sz="1500">
-                <a:solidFill>
-                  <a:srgbClr val="22282E"/>
-                </a:solidFill>
-              </a:rPr>
-              <a:t>•  Cuestionario de suscripción: responde (para la empresa ficticia) las preguntas típicas: ¿MFA en accesos remotos y privilegiados? ¿EDR desplegado? ¿backups offline probados? ¿plan de respuesta a incidentes? ¿formación de phishing? Marca cuáles cumples y cuáles no.</a:t>
-            </a:r>
-          </a:p>
-          <a:p>
-            <a:pPr>
-              <a:spcAft>
-                <a:spcPts val="600"/>
-              </a:spcAft>
-            </a:pPr>
-            <a:r>
-              <a:rPr sz="1500">
-                <a:solidFill>
-                  <a:srgbClr val="22282E"/>
-                </a:solidFill>
-              </a:rPr>
-              <a:t>•  Brechas que suben la prima: identifica 3 carencias del cuestionario y qué control implementarías para bajar la prima o poder asegurarte.</a:t>
-            </a:r>
-          </a:p>
-          <a:p>
-            <a:pPr>
-              <a:spcAft>
-                <a:spcPts val="600"/>
-              </a:spcAft>
-            </a:pPr>
-            <a:r>
-              <a:rPr sz="1500">
-                <a:solidFill>
-                  <a:srgbClr val="22282E"/>
-                </a:solidFill>
-              </a:rPr>
-              <a:t>•  Análisis de exclusiones: revisa una lista de exclusiones típicas (guerra, controles declarados inexistentes, incumplimiento de parches conocidos) y explica el riesgo de declarar controles que no operas.</a:t>
+              <a:t>•  Existe dominio cuando el alumno compara escenarios con texto contractual, identifica riesgo retenido y conecta notificación con IR.</a:t>
             </a:r>
           </a:p>
         </p:txBody>
@@ -4599,7 +4960,7 @@
                   <a:srgbClr val="0B3D2E"/>
                 </a:solidFill>
               </a:rPr>
-              <a:t>✍️ Ejercicios</a:t>
+              <a:t>📖 Definiciones y características</a:t>
             </a:r>
           </a:p>
         </p:txBody>
@@ -4637,82 +4998,97 @@
                   <a:srgbClr val="22282E"/>
                 </a:solidFill>
               </a:rPr>
-              <a:t>•  Clasifica en primera o tercera parte: honorarios de abogados por demanda de clientes; coste del forense; multa de la autoridad de protección de datos.</a:t>
-            </a:r>
-          </a:p>
-          <a:p>
-            <a:pPr>
-              <a:spcAft>
-                <a:spcPts val="600"/>
-              </a:spcAft>
-            </a:pPr>
-            <a:r>
-              <a:rPr sz="1500">
-                <a:solidFill>
-                  <a:srgbClr val="22282E"/>
-                </a:solidFill>
-              </a:rPr>
-              <a:t>•  Explica por qué el seguro transfiere el coste pero no la responsabilidad legal.</a:t>
-            </a:r>
-          </a:p>
-          <a:p>
-            <a:pPr>
-              <a:spcAft>
-                <a:spcPts val="600"/>
-              </a:spcAft>
-            </a:pPr>
-            <a:r>
-              <a:rPr sz="1500">
-                <a:solidFill>
-                  <a:srgbClr val="22282E"/>
-                </a:solidFill>
-              </a:rPr>
-              <a:t>•  Un asegurado declaró tener MFA pero no lo tenía; sufre ransomware. ¿Qué puede pasar con el siniestro?</a:t>
-            </a:r>
-          </a:p>
-          <a:p>
-            <a:pPr>
-              <a:spcAft>
-                <a:spcPts val="600"/>
-              </a:spcAft>
-            </a:pPr>
-            <a:r>
-              <a:rPr sz="1500">
-                <a:solidFill>
-                  <a:srgbClr val="22282E"/>
-                </a:solidFill>
-              </a:rPr>
-              <a:t>•  Dado un ALE y un P90, argumenta qué límite de cobertura pedirías.</a:t>
-            </a:r>
-          </a:p>
-          <a:p>
-            <a:pPr>
-              <a:spcAft>
-                <a:spcPts val="600"/>
-              </a:spcAft>
-            </a:pPr>
-            <a:r>
-              <a:rPr sz="1500">
-                <a:solidFill>
-                  <a:srgbClr val="22282E"/>
-                </a:solidFill>
-              </a:rPr>
-              <a:t>•  Enumera 4 requisitos de suscripción habituales y por qué las aseguradoras los exigen.</a:t>
-            </a:r>
-          </a:p>
-          <a:p>
-            <a:pPr>
-              <a:spcAft>
-                <a:spcPts val="600"/>
-              </a:spcAft>
-            </a:pPr>
-            <a:r>
-              <a:rPr sz="1500">
-                <a:solidFill>
-                  <a:srgbClr val="22282E"/>
-                </a:solidFill>
-              </a:rPr>
-              <a:t>•  Explica el "riesgo moral" de confiar solo en el seguro y descuidar los controles.</a:t>
+              <a:t>•  Transferencia de riesgo: trasladar el impacto financiero a un tercero (aseguradora). Clave: transfiere el coste, no la responsabilidad.</a:t>
+            </a:r>
+          </a:p>
+          <a:p>
+            <a:pPr>
+              <a:spcAft>
+                <a:spcPts val="600"/>
+              </a:spcAft>
+            </a:pPr>
+            <a:r>
+              <a:rPr sz="1500">
+                <a:solidFill>
+                  <a:srgbClr val="22282E"/>
+                </a:solidFill>
+              </a:rPr>
+              <a:t>•  Cobertura de primera parte: gastos propios (recuperación, forense, notificación, extorsión, lucro cesante). Clave: te paga a ti.</a:t>
+            </a:r>
+          </a:p>
+          <a:p>
+            <a:pPr>
+              <a:spcAft>
+                <a:spcPts val="600"/>
+              </a:spcAft>
+            </a:pPr>
+            <a:r>
+              <a:rPr sz="1500">
+                <a:solidFill>
+                  <a:srgbClr val="22282E"/>
+                </a:solidFill>
+              </a:rPr>
+              <a:t>•  Cobertura de tercera parte: reclamaciones de terceros (clientes, reguladores) por la brecha. Clave: te defiende frente a otros.</a:t>
+            </a:r>
+          </a:p>
+          <a:p>
+            <a:pPr>
+              <a:spcAft>
+                <a:spcPts val="600"/>
+              </a:spcAft>
+            </a:pPr>
+            <a:r>
+              <a:rPr sz="1500">
+                <a:solidFill>
+                  <a:srgbClr val="22282E"/>
+                </a:solidFill>
+              </a:rPr>
+              <a:t>•  Exclusión: supuesto no cubierto (actos de guerra, negligencia grave, controles falsos declarados). Clave: leer siempre la letra pequeña.</a:t>
+            </a:r>
+          </a:p>
+          <a:p>
+            <a:pPr>
+              <a:spcAft>
+                <a:spcPts val="600"/>
+              </a:spcAft>
+            </a:pPr>
+            <a:r>
+              <a:rPr sz="1500">
+                <a:solidFill>
+                  <a:srgbClr val="22282E"/>
+                </a:solidFill>
+              </a:rPr>
+              <a:t>•  Límite y sublímite: máximo total y máximo por tipo de cobertura. Clave: un sublímite bajo de ransomware puede dejarte corto.</a:t>
+            </a:r>
+          </a:p>
+          <a:p>
+            <a:pPr>
+              <a:spcAft>
+                <a:spcPts val="600"/>
+              </a:spcAft>
+            </a:pPr>
+            <a:r>
+              <a:rPr sz="1500">
+                <a:solidFill>
+                  <a:srgbClr val="22282E"/>
+                </a:solidFill>
+              </a:rPr>
+              <a:t>•  Franquicia (deducible): importe que asumes antes de que pague el seguro. Clave: a mayor franquicia, menor prima.</a:t>
+            </a:r>
+          </a:p>
+          <a:p>
+            <a:pPr>
+              <a:spcAft>
+                <a:spcPts val="600"/>
+              </a:spcAft>
+            </a:pPr>
+            <a:r>
+              <a:rPr sz="1500">
+                <a:solidFill>
+                  <a:srgbClr val="22282E"/>
+                </a:solidFill>
+              </a:rPr>
+              <a:t>•  Underwriting: proceso de evaluación de tu riesgo para fijar prima y condiciones. Clave: exige evidencia de controles.</a:t>
             </a:r>
           </a:p>
         </p:txBody>
@@ -4763,7 +5139,7 @@
                   <a:srgbClr val="0B3D2E"/>
                 </a:solidFill>
               </a:rPr>
-              <a:t>📝 Reto verificable</a:t>
+              <a:t>🧰 Herramientas y preparación</a:t>
             </a:r>
           </a:p>
         </p:txBody>
@@ -4801,22 +5177,52 @@
                   <a:srgbClr val="22282E"/>
                 </a:solidFill>
               </a:rPr>
-              <a:t>•  Entrega un dossier de evaluación de ciberseguro con: decisión de tratamiento (mitigar/aceptar/transferir) justificada por el ALE, lista de coberturas requeridas, cuestionario de suscripción respondido con brechas identificadas, análisis de exclusiones y una propuesta de límite y franquicia razonada.</a:t>
-            </a:r>
-          </a:p>
-          <a:p>
-            <a:pPr>
-              <a:spcAft>
-                <a:spcPts val="600"/>
-              </a:spcAft>
-            </a:pPr>
-            <a:r>
-              <a:rPr sz="1500">
-                <a:solidFill>
-                  <a:srgbClr val="22282E"/>
-                </a:solidFill>
-              </a:rPr>
-              <a:t>•  Criterio de aceptación: la suma asegurada se justifica con el análisis de riesgo (ALE/P90), se identifican al menos 3 controles que mejorarían la asegurabilidad, y el dossier deja claro que el seguro complementa —no reemplaza— los controles.</a:t>
+              <a:t>•  El resultado de tu análisis de riesgo cuantitativo (ALE) de la clase 277.</a:t>
+            </a:r>
+          </a:p>
+          <a:p>
+            <a:pPr>
+              <a:spcAft>
+                <a:spcPts val="600"/>
+              </a:spcAft>
+            </a:pPr>
+            <a:r>
+              <a:rPr sz="1500">
+                <a:solidFill>
+                  <a:srgbClr val="22282E"/>
+                </a:solidFill>
+              </a:rPr>
+              <a:t>•  Un cuestionario de suscripción de ciberseguro de referencia (los publican corredores y aseguradoras).</a:t>
+            </a:r>
+          </a:p>
+          <a:p>
+            <a:pPr>
+              <a:spcAft>
+                <a:spcPts val="600"/>
+              </a:spcAft>
+            </a:pPr>
+            <a:r>
+              <a:rPr sz="1500">
+                <a:solidFill>
+                  <a:srgbClr val="22282E"/>
+                </a:solidFill>
+              </a:rPr>
+              <a:t>•  Referencia conceptual: informes de mercado de ciberseguro (Marsh, Munich Re) y las guías de ENISA/CISA sobre transferencia de riesgo.</a:t>
+            </a:r>
+          </a:p>
+          <a:p>
+            <a:pPr>
+              <a:spcAft>
+                <a:spcPts val="600"/>
+              </a:spcAft>
+            </a:pPr>
+            <a:r>
+              <a:rPr sz="1500">
+                <a:solidFill>
+                  <a:srgbClr val="22282E"/>
+                </a:solidFill>
+              </a:rPr>
+              <a:t>•  Hoja de cálculo para comparar coberturas y calcular la suma asegurada.</a:t>
             </a:r>
           </a:p>
         </p:txBody>
